--- a/decks/englang-rhetoric/englang-rhetoric_ch6_counterargument-conclusion.pptx
+++ b/decks/englang-rhetoric/englang-rhetoric_ch6_counterargument-conclusion.pptx
@@ -125,29 +125,29 @@
   <p:extLst>
     <p:ext uri="{521415D9-36F7-43E2-AB2F-B90AF26B5E84}">
       <p14:sectionLst xmlns:p14="http://schemas.microsoft.com/office/powerpoint/2010/main">
-        <p14:section name="Opening" id="{cbff3a85-1725-f570-81de-94710df91322}">
+        <p14:section name="Opening" id="{e224cf52-089b-eb15-2c91-ed5ee6a8fd46}">
           <p14:sldIdLst>
             <p14:sldId id="256"/>
           </p14:sldIdLst>
         </p14:section>
-        <p14:section name="Gate" id="{cba41560-5f84-f8a4-ca63-5c699967dc71}">
+        <p14:section name="Gate" id="{9b988b81-9005-c317-45f6-b5252e51cf60}">
           <p14:sldIdLst>
             <p14:sldId id="257"/>
             <p14:sldId id="258"/>
           </p14:sldIdLst>
         </p14:section>
-        <p14:section name="Pre-teach" id="{8909a299-8c85-c5a1-b37b-fb539496d65f}">
+        <p14:section name="Pre-teach" id="{f3be9525-f127-4a0a-c6a3-167040d3580a}">
           <p14:sldIdLst>
             <p14:sldId id="259"/>
           </p14:sldIdLst>
         </p14:section>
-        <p14:section name="Read-along" id="{6606a052-35ab-9bd0-ae52-d4b6641ab113}">
+        <p14:section name="Read-along" id="{6c8bd0ac-49f9-5ca9-1b48-b1905f34191f}">
           <p14:sldIdLst>
             <p14:sldId id="260"/>
             <p14:sldId id="261"/>
           </p14:sldIdLst>
         </p14:section>
-        <p14:section name="Teach" id="{0d3c8243-aef5-be96-e97b-9b2e4981bd62}">
+        <p14:section name="Teach" id="{cb356f11-3c96-2503-0fe5-458a1a5341f9}">
           <p14:sldIdLst>
             <p14:sldId id="262"/>
             <p14:sldId id="263"/>
@@ -157,19 +157,19 @@
             <p14:sldId id="267"/>
           </p14:sldIdLst>
         </p14:section>
-        <p14:section name="Routes" id="{207ed122-c0e4-e7c0-6088-6599cba2eae2}">
+        <p14:section name="Routes" id="{46696557-9d4a-62d9-dbef-4f92413beb93}">
           <p14:sldIdLst>
             <p14:sldId id="268"/>
             <p14:sldId id="269"/>
             <p14:sldId id="270"/>
           </p14:sldIdLst>
         </p14:section>
-        <p14:section name="Close" id="{5d516ce8-4c24-6d26-3d44-290cbe17bf45}">
+        <p14:section name="Close" id="{efa81999-201d-d3d4-01cb-55ed4543e1bc}">
           <p14:sldIdLst>
             <p14:sldId id="271"/>
           </p14:sldIdLst>
         </p14:section>
-        <p14:section name="Answers" id="{c44b1e45-9977-5b3a-f889-3d9442960339}">
+        <p14:section name="Answers" id="{5207a23c-91dc-2689-3456-2ae202692ff1}">
           <p14:sldIdLst>
             <p14:sldId id="272"/>
             <p14:sldId id="273"/>
@@ -1325,7 +1325,7 @@
             <a:r>
               <a:rPr lang="en-US" dirty="0"/>
               <a:t>Answers — task 1: Elizabeth admits the objection. Reveal the answer; pupils mark their own work in a different colour, then read the "why" together. Same destination for every lane, so one answer serves the whole class.
-Answer: A   “the body but of a weak and feeble woman”
+Answer: C   “the body but of a weak and feeble woman”
 Why: Elizabeth names the weakness her audience might think of, then turns it with ‘but’ into a claim of strength.
 Ask a Support pupil to explain one step, and a Stretch pupil to share their extension.</a:t>
             </a:r>
@@ -1599,8 +1599,8 @@
               <a:rPr lang="en-US" dirty="0"/>
               <a:t>Do now — retrieval. Silent, no notes, no help: recall comes before any support. Give about four minutes.
 1. A ___ is what the opposing side would say, which you raise and then prove wrong.  →  counterargument
-2. In 1588, which enemy was Elizabeth I’s army at Tilbury waiting to fight?  →  A   The Spanish Armada
-3. Which adverb helps a speaker sound confident when answering a counterargument?  →  A   Clearly
+2. In 1588, which enemy was Elizabeth I’s army at Tilbury waiting to fight?  →  B   The Spanish Armada
+3. Which adverb helps a speaker sound confident when answering a counterargument?  →  C   Clearly
 Circulate: who gets 3/3 (Stretch route), 2/3 (Core), 0–1 (Support)? Use this to route pupils later in the lesson.</a:t>
             </a:r>
             <a:endParaRPr lang="en-US" dirty="0"/>
@@ -1691,8 +1691,8 @@
               <a:rPr lang="en-US" dirty="0"/>
               <a:t>Answers — pupils mark their own in a different colour, then hands up for 3/3, 2/3, 1/3.
 1. counterargument. A counterargument is the other side’s point, which you answer to make your own case stronger.
-2. A   The Spanish Armada. The Spanish Armada sailed to invade England in 1588, and its defeat is counted among England’s greatest military achievements.
-3. A   Clearly. Persuasive adverbs such as ‘clearly’, ‘surely’ and ‘evidently’ make the speaker’s answer sound certain.
+2. B   The Spanish Armada. The Spanish Armada sailed to invade England in 1588, and its defeat is counted among England’s greatest military achievements.
+3. C   Clearly. Persuasive adverbs such as ‘clearly’, ‘surely’ and ‘evidently’ make the speaker’s answer sound certain.
 Say the route each score points to: 3/3 Stretch, 2/3 Core, 0–1 Support. Pupils may choose to move up.</a:t>
             </a:r>
             <a:endParaRPr lang="en-US" dirty="0"/>
@@ -5740,7 +5740,7 @@
                 <a:ea typeface="Calibri" pitchFamily="34" charset="-122"/>
                 <a:cs typeface="Calibri" pitchFamily="34" charset="-120"/>
               </a:rPr>
-              <a:t>“the body but of a weak and feeble woman”</a:t>
+              <a:t>“I myself will be your general”</a:t>
             </a:r>
             <a:endParaRPr lang="en-US" sz="2600" dirty="0"/>
           </a:p>
@@ -5814,7 +5814,7 @@
                 <a:ea typeface="Calibri" pitchFamily="34" charset="-122"/>
                 <a:cs typeface="Calibri" pitchFamily="34" charset="-120"/>
               </a:rPr>
-              <a:t>“I myself will be your general”</a:t>
+              <a:t>“the body but of a weak and feeble woman”</a:t>
             </a:r>
             <a:endParaRPr lang="en-US" sz="2600" dirty="0"/>
           </a:p>
@@ -8793,7 +8793,7 @@
                 <a:ea typeface="Cambria" pitchFamily="34" charset="-122"/>
                 <a:cs typeface="Cambria" pitchFamily="34" charset="-120"/>
               </a:rPr>
-              <a:t>A   “the body but of a weak and feeble woman”</a:t>
+              <a:t>C   “the body but of a weak and feeble woman”</a:t>
             </a:r>
             <a:endParaRPr lang="en-US" sz="1800" dirty="0"/>
           </a:p>
@@ -10554,7 +10554,7 @@
                 <a:ea typeface="Calibri" pitchFamily="34" charset="-122"/>
                 <a:cs typeface="Calibri" pitchFamily="34" charset="-120"/>
               </a:rPr>
-              <a:t>The Spanish Armada</a:t>
+              <a:t>The Vikings</a:t>
             </a:r>
             <a:endParaRPr lang="en-US" sz="2400" dirty="0"/>
           </a:p>
@@ -10591,7 +10591,7 @@
                 <a:ea typeface="Calibri" pitchFamily="34" charset="-122"/>
                 <a:cs typeface="Calibri" pitchFamily="34" charset="-120"/>
               </a:rPr>
-              <a:t>The French navy</a:t>
+              <a:t>The Spanish Armada</a:t>
             </a:r>
             <a:endParaRPr lang="en-US" sz="2400" dirty="0"/>
           </a:p>
@@ -10665,7 +10665,7 @@
                 <a:ea typeface="Calibri" pitchFamily="34" charset="-122"/>
                 <a:cs typeface="Calibri" pitchFamily="34" charset="-120"/>
               </a:rPr>
-              <a:t>The Vikings</a:t>
+              <a:t>The French navy</a:t>
             </a:r>
             <a:endParaRPr lang="en-US" sz="2400" dirty="0"/>
           </a:p>
@@ -10869,7 +10869,7 @@
                 <a:ea typeface="Calibri" pitchFamily="34" charset="-122"/>
                 <a:cs typeface="Calibri" pitchFamily="34" charset="-120"/>
               </a:rPr>
-              <a:t>Clearly</a:t>
+              <a:t>Perhaps</a:t>
             </a:r>
             <a:endParaRPr lang="en-US" sz="2200" dirty="0"/>
           </a:p>
@@ -10906,7 +10906,7 @@
                 <a:ea typeface="Calibri" pitchFamily="34" charset="-122"/>
                 <a:cs typeface="Calibri" pitchFamily="34" charset="-120"/>
               </a:rPr>
-              <a:t>Perhaps</a:t>
+              <a:t>Maybe</a:t>
             </a:r>
             <a:endParaRPr lang="en-US" sz="2200" dirty="0"/>
           </a:p>
@@ -10943,7 +10943,7 @@
                 <a:ea typeface="Calibri" pitchFamily="34" charset="-122"/>
                 <a:cs typeface="Calibri" pitchFamily="34" charset="-120"/>
               </a:rPr>
-              <a:t>Maybe</a:t>
+              <a:t>Clearly</a:t>
             </a:r>
             <a:endParaRPr lang="en-US" sz="2200" dirty="0"/>
           </a:p>
@@ -11631,7 +11631,7 @@
                 <a:ea typeface="Calibri" pitchFamily="34" charset="-122"/>
                 <a:cs typeface="Calibri" pitchFamily="34" charset="-120"/>
               </a:rPr>
-              <a:t>A   The Spanish Armada</a:t>
+              <a:t>B   The Spanish Armada</a:t>
             </a:r>
             <a:endParaRPr lang="en-US" sz="2200" dirty="0"/>
           </a:p>
@@ -11881,7 +11881,7 @@
                 <a:ea typeface="Calibri" pitchFamily="34" charset="-122"/>
                 <a:cs typeface="Calibri" pitchFamily="34" charset="-120"/>
               </a:rPr>
-              <a:t>A   Clearly</a:t>
+              <a:t>C   Clearly</a:t>
             </a:r>
             <a:endParaRPr lang="en-US" sz="2200" dirty="0"/>
           </a:p>

--- a/decks/englang-rhetoric/englang-rhetoric_ch6_counterargument-conclusion.pptx
+++ b/decks/englang-rhetoric/englang-rhetoric_ch6_counterargument-conclusion.pptx
@@ -125,29 +125,29 @@
   <p:extLst>
     <p:ext uri="{521415D9-36F7-43E2-AB2F-B90AF26B5E84}">
       <p14:sectionLst xmlns:p14="http://schemas.microsoft.com/office/powerpoint/2010/main">
-        <p14:section name="Opening" id="{e224cf52-089b-eb15-2c91-ed5ee6a8fd46}">
+        <p14:section name="Opening" id="{d1ca20c0-54e7-ebfb-ebd8-59a47e895097}">
           <p14:sldIdLst>
             <p14:sldId id="256"/>
           </p14:sldIdLst>
         </p14:section>
-        <p14:section name="Gate" id="{9b988b81-9005-c317-45f6-b5252e51cf60}">
+        <p14:section name="Gate" id="{599e5d59-5b39-80fb-f21d-442df7762375}">
           <p14:sldIdLst>
             <p14:sldId id="257"/>
             <p14:sldId id="258"/>
           </p14:sldIdLst>
         </p14:section>
-        <p14:section name="Pre-teach" id="{f3be9525-f127-4a0a-c6a3-167040d3580a}">
+        <p14:section name="Pre-teach" id="{be1c1c4f-f216-a978-63d7-d1b5113db7d7}">
           <p14:sldIdLst>
             <p14:sldId id="259"/>
           </p14:sldIdLst>
         </p14:section>
-        <p14:section name="Read-along" id="{6c8bd0ac-49f9-5ca9-1b48-b1905f34191f}">
+        <p14:section name="Read-along" id="{478f6a71-0903-d65d-c5be-4e907504bae2}">
           <p14:sldIdLst>
             <p14:sldId id="260"/>
             <p14:sldId id="261"/>
           </p14:sldIdLst>
         </p14:section>
-        <p14:section name="Teach" id="{cb356f11-3c96-2503-0fe5-458a1a5341f9}">
+        <p14:section name="Teach" id="{084c903b-0608-1cc9-1969-e228e1e4ea34}">
           <p14:sldIdLst>
             <p14:sldId id="262"/>
             <p14:sldId id="263"/>
@@ -157,19 +157,19 @@
             <p14:sldId id="267"/>
           </p14:sldIdLst>
         </p14:section>
-        <p14:section name="Routes" id="{46696557-9d4a-62d9-dbef-4f92413beb93}">
+        <p14:section name="Routes" id="{52f048a2-10d5-9a29-5604-13d822d0a470}">
           <p14:sldIdLst>
             <p14:sldId id="268"/>
             <p14:sldId id="269"/>
             <p14:sldId id="270"/>
           </p14:sldIdLst>
         </p14:section>
-        <p14:section name="Close" id="{efa81999-201d-d3d4-01cb-55ed4543e1bc}">
+        <p14:section name="Close" id="{2320ea5c-d6fd-00a2-d239-78df4ac9c8eb}">
           <p14:sldIdLst>
             <p14:sldId id="271"/>
           </p14:sldIdLst>
         </p14:section>
-        <p14:section name="Answers" id="{5207a23c-91dc-2689-3456-2ae202692ff1}">
+        <p14:section name="Answers" id="{f2f385a4-ce7d-c4c2-739b-001efa0470e6}">
           <p14:sldIdLst>
             <p14:sldId id="272"/>
             <p14:sldId id="273"/>
